--- a/UNIUBE-MD/Slides/04 - Algebra Booleana.pptx
+++ b/UNIUBE-MD/Slides/04 - Algebra Booleana.pptx
@@ -8334,23 +8334,7 @@
                   <a:schemeClr val="bg1"/>
                 </a:solidFill>
               </a:rPr>
-              <a:t>módulo 4 – </a:t>
-            </a:r>
-            <a:r>
-              <a:rPr lang="pt-BR" dirty="0" err="1">
-                <a:solidFill>
-                  <a:schemeClr val="bg1"/>
-                </a:solidFill>
-              </a:rPr>
-              <a:t>algebra</a:t>
-            </a:r>
-            <a:r>
-              <a:rPr lang="pt-BR" dirty="0">
-                <a:solidFill>
-                  <a:schemeClr val="bg1"/>
-                </a:solidFill>
-              </a:rPr>
-              <a:t> booleana</a:t>
+              <a:t>módulo 4 – álgebra booleana</a:t>
             </a:r>
           </a:p>
         </p:txBody>
@@ -8915,8 +8899,8 @@
           </a:p>
         </p:txBody>
       </p:sp>
-      <mc:AlternateContent xmlns:mc="http://schemas.openxmlformats.org/markup-compatibility/2006">
-        <mc:Choice xmlns:a14="http://schemas.microsoft.com/office/drawing/2010/main" Requires="a14">
+      <mc:AlternateContent xmlns:mc="http://schemas.openxmlformats.org/markup-compatibility/2006" xmlns:a14="http://schemas.microsoft.com/office/drawing/2010/main">
+        <mc:Choice Requires="a14">
           <p:sp>
             <p:nvSpPr>
               <p:cNvPr id="6" name="Espaço Reservado para Conteúdo 5">
@@ -9427,7 +9411,7 @@
             </p:txBody>
           </p:sp>
         </mc:Choice>
-        <mc:Fallback>
+        <mc:Fallback xmlns="">
           <p:sp>
             <p:nvSpPr>
               <p:cNvPr id="6" name="Espaço Reservado para Conteúdo 5">
@@ -10102,8 +10086,8 @@
           </a:p>
         </p:txBody>
       </p:sp>
-      <mc:AlternateContent xmlns:mc="http://schemas.openxmlformats.org/markup-compatibility/2006">
-        <mc:Choice xmlns:a14="http://schemas.microsoft.com/office/drawing/2010/main" Requires="a14">
+      <mc:AlternateContent xmlns:mc="http://schemas.openxmlformats.org/markup-compatibility/2006" xmlns:a14="http://schemas.microsoft.com/office/drawing/2010/main">
+        <mc:Choice Requires="a14">
           <p:sp>
             <p:nvSpPr>
               <p:cNvPr id="6" name="Espaço Reservado para Conteúdo 5">
@@ -10374,7 +10358,7 @@
             </p:txBody>
           </p:sp>
         </mc:Choice>
-        <mc:Fallback>
+        <mc:Fallback xmlns="">
           <p:sp>
             <p:nvSpPr>
               <p:cNvPr id="6" name="Espaço Reservado para Conteúdo 5">
@@ -10618,8 +10602,8 @@
           </a:p>
         </p:txBody>
       </p:sp>
-      <mc:AlternateContent xmlns:mc="http://schemas.openxmlformats.org/markup-compatibility/2006">
-        <mc:Choice xmlns:a14="http://schemas.microsoft.com/office/drawing/2010/main" Requires="a14">
+      <mc:AlternateContent xmlns:mc="http://schemas.openxmlformats.org/markup-compatibility/2006" xmlns:a14="http://schemas.microsoft.com/office/drawing/2010/main">
+        <mc:Choice Requires="a14">
           <p:sp>
             <p:nvSpPr>
               <p:cNvPr id="6" name="Espaço Reservado para Conteúdo 5">
@@ -10739,21 +10723,7 @@
                           <m:nor/>
                         </m:rPr>
                         <a:rPr lang="pt-BR" sz="2800" b="0" i="1" smtClean="0"/>
-                        <m:t> </m:t>
-                      </m:r>
-                      <m:r>
-                        <m:rPr>
-                          <m:nor/>
-                        </m:rPr>
-                        <a:rPr lang="pt-BR" sz="2800" i="1"/>
-                        <m:t>→</m:t>
-                      </m:r>
-                      <m:r>
-                        <m:rPr>
-                          <m:nor/>
-                        </m:rPr>
-                        <a:rPr lang="pt-BR" sz="2800" b="0" i="1" smtClean="0"/>
-                        <m:t> </m:t>
+                        <m:t> → </m:t>
                       </m:r>
                       <m:r>
                         <m:rPr>
@@ -10767,21 +10737,7 @@
                           <m:nor/>
                         </m:rPr>
                         <a:rPr lang="pt-BR" sz="2800" b="0" i="1" smtClean="0"/>
-                        <m:t> </m:t>
-                      </m:r>
-                      <m:r>
-                        <m:rPr>
-                          <m:nor/>
-                        </m:rPr>
-                        <a:rPr lang="pt-BR" sz="2800" b="0" i="1" smtClean="0"/>
-                        <m:t>=</m:t>
-                      </m:r>
-                      <m:r>
-                        <m:rPr>
-                          <m:nor/>
-                        </m:rPr>
-                        <a:rPr lang="pt-BR" sz="2800" b="0" i="1" smtClean="0"/>
-                        <m:t> </m:t>
+                        <m:t> = </m:t>
                       </m:r>
                       <m:acc>
                         <m:accPr>
@@ -10806,14 +10762,7 @@
                           <m:nor/>
                         </m:rPr>
                         <a:rPr lang="pt-BR" sz="2800" b="0" i="1" smtClean="0"/>
-                        <m:t> </m:t>
-                      </m:r>
-                      <m:r>
-                        <m:rPr>
-                          <m:nor/>
-                        </m:rPr>
-                        <a:rPr lang="pt-BR" sz="2800" b="0" i="1" smtClean="0"/>
-                        <m:t>* </m:t>
+                        <m:t> ∗ </m:t>
                       </m:r>
                       <m:r>
                         <m:rPr>
@@ -10830,7 +10779,7 @@
             </p:txBody>
           </p:sp>
         </mc:Choice>
-        <mc:Fallback>
+        <mc:Fallback xmlns="">
           <p:sp>
             <p:nvSpPr>
               <p:cNvPr id="6" name="Espaço Reservado para Conteúdo 5">
@@ -11002,8 +10951,8 @@
           </a:p>
         </p:txBody>
       </p:sp>
-      <mc:AlternateContent xmlns:mc="http://schemas.openxmlformats.org/markup-compatibility/2006">
-        <mc:Choice xmlns:a14="http://schemas.microsoft.com/office/drawing/2010/main" Requires="a14">
+      <mc:AlternateContent xmlns:mc="http://schemas.openxmlformats.org/markup-compatibility/2006" xmlns:a14="http://schemas.microsoft.com/office/drawing/2010/main">
+        <mc:Choice Requires="a14">
           <p:sp>
             <p:nvSpPr>
               <p:cNvPr id="6" name="Espaço Reservado para Conteúdo 5">
@@ -11265,7 +11214,7 @@
             </p:txBody>
           </p:sp>
         </mc:Choice>
-        <mc:Fallback>
+        <mc:Fallback xmlns="">
           <p:sp>
             <p:nvSpPr>
               <p:cNvPr id="6" name="Espaço Reservado para Conteúdo 5">
@@ -11509,8 +11458,8 @@
           </a:p>
         </p:txBody>
       </p:sp>
-      <mc:AlternateContent xmlns:mc="http://schemas.openxmlformats.org/markup-compatibility/2006">
-        <mc:Choice xmlns:a14="http://schemas.microsoft.com/office/drawing/2010/main" Requires="a14">
+      <mc:AlternateContent xmlns:mc="http://schemas.openxmlformats.org/markup-compatibility/2006" xmlns:a14="http://schemas.microsoft.com/office/drawing/2010/main">
+        <mc:Choice Requires="a14">
           <p:sp>
             <p:nvSpPr>
               <p:cNvPr id="6" name="Espaço Reservado para Conteúdo 5">
@@ -11634,7 +11583,7 @@
             </p:txBody>
           </p:sp>
         </mc:Choice>
-        <mc:Fallback>
+        <mc:Fallback xmlns="">
           <p:sp>
             <p:nvSpPr>
               <p:cNvPr id="6" name="Espaço Reservado para Conteúdo 5">
@@ -11678,8 +11627,8 @@
           </p:sp>
         </mc:Fallback>
       </mc:AlternateContent>
-      <mc:AlternateContent xmlns:mc="http://schemas.openxmlformats.org/markup-compatibility/2006">
-        <mc:Choice xmlns:a14="http://schemas.microsoft.com/office/drawing/2010/main" Requires="a14">
+      <mc:AlternateContent xmlns:mc="http://schemas.openxmlformats.org/markup-compatibility/2006" xmlns:a14="http://schemas.microsoft.com/office/drawing/2010/main">
+        <mc:Choice Requires="a14">
           <p:graphicFrame>
             <p:nvGraphicFramePr>
               <p:cNvPr id="4" name="Tabela 3">
@@ -12136,7 +12085,7 @@
             </a:graphic>
           </p:graphicFrame>
         </mc:Choice>
-        <mc:Fallback>
+        <mc:Fallback xmlns="">
           <p:graphicFrame>
             <p:nvGraphicFramePr>
               <p:cNvPr id="4" name="Tabela 3">
@@ -12786,8 +12735,8 @@
           </a:p>
         </p:txBody>
       </p:sp>
-      <mc:AlternateContent xmlns:mc="http://schemas.openxmlformats.org/markup-compatibility/2006">
-        <mc:Choice xmlns:a14="http://schemas.microsoft.com/office/drawing/2010/main" Requires="a14">
+      <mc:AlternateContent xmlns:mc="http://schemas.openxmlformats.org/markup-compatibility/2006" xmlns:a14="http://schemas.microsoft.com/office/drawing/2010/main">
+        <mc:Choice Requires="a14">
           <p:sp>
             <p:nvSpPr>
               <p:cNvPr id="6" name="Espaço Reservado para Conteúdo 5">
@@ -12893,7 +12842,7 @@
             </p:txBody>
           </p:sp>
         </mc:Choice>
-        <mc:Fallback>
+        <mc:Fallback xmlns="">
           <p:sp>
             <p:nvSpPr>
               <p:cNvPr id="6" name="Espaço Reservado para Conteúdo 5">
@@ -12937,8 +12886,8 @@
           </p:sp>
         </mc:Fallback>
       </mc:AlternateContent>
-      <mc:AlternateContent xmlns:mc="http://schemas.openxmlformats.org/markup-compatibility/2006">
-        <mc:Choice xmlns:a14="http://schemas.microsoft.com/office/drawing/2010/main" Requires="a14">
+      <mc:AlternateContent xmlns:mc="http://schemas.openxmlformats.org/markup-compatibility/2006" xmlns:a14="http://schemas.microsoft.com/office/drawing/2010/main">
+        <mc:Choice Requires="a14">
           <p:graphicFrame>
             <p:nvGraphicFramePr>
               <p:cNvPr id="4" name="Tabela 3">
@@ -13377,7 +13326,7 @@
             </a:graphic>
           </p:graphicFrame>
         </mc:Choice>
-        <mc:Fallback>
+        <mc:Fallback xmlns="">
           <p:graphicFrame>
             <p:nvGraphicFramePr>
               <p:cNvPr id="4" name="Tabela 3">
@@ -14027,8 +13976,8 @@
           </a:p>
         </p:txBody>
       </p:sp>
-      <mc:AlternateContent xmlns:mc="http://schemas.openxmlformats.org/markup-compatibility/2006">
-        <mc:Choice xmlns:a14="http://schemas.microsoft.com/office/drawing/2010/main" Requires="a14">
+      <mc:AlternateContent xmlns:mc="http://schemas.openxmlformats.org/markup-compatibility/2006" xmlns:a14="http://schemas.microsoft.com/office/drawing/2010/main">
+        <mc:Choice Requires="a14">
           <p:sp>
             <p:nvSpPr>
               <p:cNvPr id="6" name="Espaço Reservado para Conteúdo 5">
@@ -14365,7 +14314,7 @@
             </p:txBody>
           </p:sp>
         </mc:Choice>
-        <mc:Fallback>
+        <mc:Fallback xmlns="">
           <p:sp>
             <p:nvSpPr>
               <p:cNvPr id="6" name="Espaço Reservado para Conteúdo 5">
@@ -14537,8 +14486,8 @@
           </a:p>
         </p:txBody>
       </p:sp>
-      <mc:AlternateContent xmlns:mc="http://schemas.openxmlformats.org/markup-compatibility/2006">
-        <mc:Choice xmlns:a14="http://schemas.microsoft.com/office/drawing/2010/main" Requires="a14">
+      <mc:AlternateContent xmlns:mc="http://schemas.openxmlformats.org/markup-compatibility/2006" xmlns:a14="http://schemas.microsoft.com/office/drawing/2010/main">
+        <mc:Choice Requires="a14">
           <p:sp>
             <p:nvSpPr>
               <p:cNvPr id="6" name="Espaço Reservado para Conteúdo 5">
@@ -14640,6 +14589,9 @@
                     </m:r>
                   </m:oMath>
                 </a14:m>
+                <a:endParaRPr lang="pt-BR" i="1" dirty="0">
+                  <a:latin typeface="Cambria Math" panose="02040503050406030204" pitchFamily="18" charset="0"/>
+                </a:endParaRPr>
               </a:p>
               <a:p>
                 <a:endParaRPr lang="pt-BR" sz="2200" b="1" dirty="0"/>
@@ -14709,7 +14661,9 @@
               </a:p>
               <a:p>
                 <a:pPr lvl="1"/>
-                <a14:m/>
+                <a:endParaRPr lang="pt-BR" sz="2200" i="1" dirty="0">
+                  <a:latin typeface="Cambria Math" panose="02040503050406030204" pitchFamily="18" charset="0"/>
+                </a:endParaRPr>
               </a:p>
               <a:p>
                 <a:pPr algn="just"/>
@@ -15010,7 +14964,7 @@
             </p:txBody>
           </p:sp>
         </mc:Choice>
-        <mc:Fallback>
+        <mc:Fallback xmlns="">
           <p:sp>
             <p:nvSpPr>
               <p:cNvPr id="6" name="Espaço Reservado para Conteúdo 5">
@@ -15054,8 +15008,8 @@
           </p:sp>
         </mc:Fallback>
       </mc:AlternateContent>
-      <mc:AlternateContent xmlns:mc="http://schemas.openxmlformats.org/markup-compatibility/2006">
-        <mc:Choice xmlns:a14="http://schemas.microsoft.com/office/drawing/2010/main" Requires="a14">
+      <mc:AlternateContent xmlns:mc="http://schemas.openxmlformats.org/markup-compatibility/2006" xmlns:a14="http://schemas.microsoft.com/office/drawing/2010/main">
+        <mc:Choice Requires="a14">
           <p:sp>
             <p:nvSpPr>
               <p:cNvPr id="3" name="Espaço Reservado para Conteúdo 5">
@@ -15628,7 +15582,7 @@
             </p:txBody>
           </p:sp>
         </mc:Choice>
-        <mc:Fallback>
+        <mc:Fallback xmlns="">
           <p:sp>
             <p:nvSpPr>
               <p:cNvPr id="3" name="Espaço Reservado para Conteúdo 5">
